--- a/docs/assets/downloads/avatar-scenario.pptx
+++ b/docs/assets/downloads/avatar-scenario.pptx
@@ -2924,7 +2924,7 @@
       </p:grpSpPr>
       <p:pic>
         <p:nvPicPr>
-          <p:cNvPr id="2" name="Image 0" descr="/home/marco/fy27-hackathons/frontier-ai-starter-kit-rvas/docs/assets/img/logo-mark-white-slide.png">    </p:cNvPr>
+          <p:cNvPr id="2" name="Image 0" descr="/Users/marco/Desktop/repo/frontier-agentic-cobuild-rvas/docs/assets/img/logo-mark-white-slide.png">    </p:cNvPr>
           <p:cNvPicPr>
             <a:picLocks noChangeAspect="1"/>
           </p:cNvPicPr>
@@ -3178,7 +3178,7 @@
                 <a:ea typeface="Inter" pitchFamily="34" charset="-122"/>
                 <a:cs typeface="Inter" pitchFamily="34" charset="-120"/>
               </a:rPr>
-              <a:t>Workshop outcome: choose the application goal, media path, approval boundary, accessible fallback, and evidence needed for a controlled pilot.</a:t>
+              <a:t>Choose the application goal, media path, approval boundary, accessible fallback, and evidence needed for a controlled pilot.</a:t>
             </a:r>
             <a:endParaRPr lang="en-US" sz="1700" dirty="0"/>
           </a:p>
@@ -3245,7 +3245,7 @@
       </p:sp>
       <p:pic>
         <p:nvPicPr>
-          <p:cNvPr id="3" name="Image 0" descr="/home/marco/fy27-hackathons/frontier-ai-starter-kit-rvas/docs/assets/img/logo-mark-slide.png">    </p:cNvPr>
+          <p:cNvPr id="3" name="Image 0" descr="/Users/marco/Desktop/repo/frontier-agentic-cobuild-rvas/docs/assets/img/logo-mark-slide.png">    </p:cNvPr>
           <p:cNvPicPr>
             <a:picLocks noChangeAspect="1"/>
           </p:cNvPicPr>
@@ -3382,7 +3382,7 @@
                 <a:ea typeface="Outfit" pitchFamily="34" charset="-122"/>
                 <a:cs typeface="Outfit" pitchFamily="34" charset="-120"/>
               </a:rPr>
-              <a:t>Module 3 — Choices and trade-offs</a:t>
+              <a:t>Module 3. Choices and trade-offs</a:t>
             </a:r>
             <a:endParaRPr lang="en-US" sz="3400" dirty="0"/>
           </a:p>
@@ -3464,41 +3464,6 @@
                 <a:ea typeface="Inter" pitchFamily="34" charset="-122"/>
                 <a:cs typeface="Inter" pitchFamily="34" charset="-120"/>
               </a:rPr>
-              <a:t>Teams need controls that protect employees without making simple updates impossible.</a:t>
-            </a:r>
-            <a:endParaRPr lang="en-US" sz="1700" dirty="0"/>
-          </a:p>
-          <a:p>
-            <a:pPr indent="0" marL="0">
-              <a:buNone/>
-            </a:pPr>
-            <a:r>
-              <a:rPr lang="en-US" sz="1700" dirty="0">
-                <a:solidFill>
-                  <a:srgbClr val="111827"/>
-                </a:solidFill>
-                <a:latin typeface="Inter" pitchFamily="34" charset="0"/>
-                <a:ea typeface="Inter" pitchFamily="34" charset="-122"/>
-                <a:cs typeface="Inter" pitchFamily="34" charset="-120"/>
-              </a:rPr>
-              <a:t>
-</a:t>
-            </a:r>
-            <a:endParaRPr lang="en-US" sz="1700" dirty="0"/>
-          </a:p>
-          <a:p>
-            <a:pPr indent="0" marL="0">
-              <a:buNone/>
-            </a:pPr>
-            <a:r>
-              <a:rPr lang="en-US" sz="1700" dirty="0">
-                <a:solidFill>
-                  <a:srgbClr val="111827"/>
-                </a:solidFill>
-                <a:latin typeface="Inter" pitchFamily="34" charset="0"/>
-                <a:ea typeface="Inter" pitchFamily="34" charset="-122"/>
-                <a:cs typeface="Inter" pitchFamily="34" charset="-120"/>
-              </a:rPr>
               <a:t>Discussion choices:</a:t>
             </a:r>
             <a:endParaRPr lang="en-US" sz="1700" dirty="0"/>
@@ -3642,7 +3607,7 @@
                 <a:ea typeface="Inter" pitchFamily="34" charset="-122"/>
                 <a:cs typeface="Inter" pitchFamily="34" charset="-120"/>
               </a:rPr>
-              <a:t>This is a speed-versus-confidence choice. Start with a small, well-owned pilot corpus.</a:t>
+              <a:t>Start with a small pilot corpus and name its content owner.</a:t>
             </a:r>
             <a:endParaRPr lang="en-US" sz="1700" dirty="0"/>
           </a:p>
@@ -3709,7 +3674,7 @@
       </p:sp>
       <p:pic>
         <p:nvPicPr>
-          <p:cNvPr id="3" name="Image 0" descr="/home/marco/fy27-hackathons/frontier-ai-starter-kit-rvas/docs/assets/img/logo-mark-slide.png">    </p:cNvPr>
+          <p:cNvPr id="3" name="Image 0" descr="/Users/marco/Desktop/repo/frontier-agentic-cobuild-rvas/docs/assets/img/logo-mark-slide.png">    </p:cNvPr>
           <p:cNvPicPr>
             <a:picLocks noChangeAspect="1"/>
           </p:cNvPicPr>
@@ -3846,7 +3811,7 @@
                 <a:ea typeface="Outfit" pitchFamily="34" charset="-122"/>
                 <a:cs typeface="Outfit" pitchFamily="34" charset="-120"/>
               </a:rPr>
-              <a:t>Module 3 — What must be true</a:t>
+              <a:t>Module 3. What must be true</a:t>
             </a:r>
             <a:endParaRPr lang="en-US" sz="3400" dirty="0"/>
           </a:p>
@@ -4156,7 +4121,7 @@
       </p:sp>
       <p:pic>
         <p:nvPicPr>
-          <p:cNvPr id="3" name="Image 0" descr="/home/marco/fy27-hackathons/frontier-ai-starter-kit-rvas/docs/assets/img/logo-mark-slide.png">    </p:cNvPr>
+          <p:cNvPr id="3" name="Image 0" descr="/Users/marco/Desktop/repo/frontier-agentic-cobuild-rvas/docs/assets/img/logo-mark-slide.png">    </p:cNvPr>
           <p:cNvPicPr>
             <a:picLocks noChangeAspect="1"/>
           </p:cNvPicPr>
@@ -4293,7 +4258,7 @@
                 <a:ea typeface="Outfit" pitchFamily="34" charset="-122"/>
                 <a:cs typeface="Outfit" pitchFamily="34" charset="-120"/>
               </a:rPr>
-              <a:t>Module 4 — Context</a:t>
+              <a:t>Module 4. Context</a:t>
             </a:r>
             <a:endParaRPr lang="en-US" sz="3400" dirty="0"/>
           </a:p>
@@ -4620,7 +4585,7 @@
       </p:sp>
       <p:pic>
         <p:nvPicPr>
-          <p:cNvPr id="3" name="Image 0" descr="/home/marco/fy27-hackathons/frontier-ai-starter-kit-rvas/docs/assets/img/logo-mark-slide.png">    </p:cNvPr>
+          <p:cNvPr id="3" name="Image 0" descr="/Users/marco/Desktop/repo/frontier-agentic-cobuild-rvas/docs/assets/img/logo-mark-slide.png">    </p:cNvPr>
           <p:cNvPicPr>
             <a:picLocks noChangeAspect="1"/>
           </p:cNvPicPr>
@@ -4757,7 +4722,7 @@
                 <a:ea typeface="Outfit" pitchFamily="34" charset="-122"/>
                 <a:cs typeface="Outfit" pitchFamily="34" charset="-120"/>
               </a:rPr>
-              <a:t>Module 4 — Choices and trade-offs</a:t>
+              <a:t>Module 4. Choices and trade-offs</a:t>
             </a:r>
             <a:endParaRPr lang="en-US" sz="3400" dirty="0"/>
           </a:p>
@@ -5017,7 +4982,7 @@
                 <a:ea typeface="Inter" pitchFamily="34" charset="-122"/>
                 <a:cs typeface="Inter" pitchFamily="34" charset="-120"/>
               </a:rPr>
-              <a:t>Make the assistant reliable at grounded drafting, refusal, and escalation before you broaden interaction.</a:t>
+              <a:t>Test grounded drafting, refusal, and escalation before adding more supported questions.</a:t>
             </a:r>
             <a:endParaRPr lang="en-US" sz="1700" dirty="0"/>
           </a:p>
@@ -5084,7 +5049,7 @@
       </p:sp>
       <p:pic>
         <p:nvPicPr>
-          <p:cNvPr id="3" name="Image 0" descr="/home/marco/fy27-hackathons/frontier-ai-starter-kit-rvas/docs/assets/img/logo-mark-slide.png">    </p:cNvPr>
+          <p:cNvPr id="3" name="Image 0" descr="/Users/marco/Desktop/repo/frontier-agentic-cobuild-rvas/docs/assets/img/logo-mark-slide.png">    </p:cNvPr>
           <p:cNvPicPr>
             <a:picLocks noChangeAspect="1"/>
           </p:cNvPicPr>
@@ -5221,7 +5186,7 @@
                 <a:ea typeface="Outfit" pitchFamily="34" charset="-122"/>
                 <a:cs typeface="Outfit" pitchFamily="34" charset="-120"/>
               </a:rPr>
-              <a:t>Module 4 — What must be true</a:t>
+              <a:t>Module 4. What must be true</a:t>
             </a:r>
             <a:endParaRPr lang="en-US" sz="3400" dirty="0"/>
           </a:p>
@@ -5303,7 +5268,7 @@
                 <a:ea typeface="Inter" pitchFamily="34" charset="-122"/>
                 <a:cs typeface="Inter" pitchFamily="34" charset="-120"/>
               </a:rPr>
-              <a:t>The evidence should show accountable content work:</a:t>
+              <a:t>Check the generated drafts and live responses:</a:t>
             </a:r>
             <a:endParaRPr lang="en-US" sz="1700" dirty="0"/>
           </a:p>
@@ -5375,7 +5340,7 @@
                 <a:ea typeface="Inter" pitchFamily="34" charset="-122"/>
                 <a:cs typeface="Inter" pitchFamily="34" charset="-120"/>
               </a:rPr>
-              <a:t>reviewer prompts produce evidence, not unsupported confidence</a:t>
+              <a:t>reviewer prompts return source evidence for each claim</a:t>
             </a:r>
             <a:endParaRPr lang="en-US" sz="1700" dirty="0"/>
           </a:p>
@@ -5446,7 +5411,7 @@
                 <a:ea typeface="Inter" pitchFamily="34" charset="-122"/>
                 <a:cs typeface="Inter" pitchFamily="34" charset="-120"/>
               </a:rPr>
-              <a:t>Discussion: Which answer would worry us more: “I don’t know” or a confident answer without a source?</a:t>
+              <a:t>Discussion: Which answer would worry us more: "I don't know" or a confident answer without a source?</a:t>
             </a:r>
             <a:endParaRPr lang="en-US" sz="1700" dirty="0"/>
           </a:p>
@@ -5513,7 +5478,7 @@
       </p:sp>
       <p:pic>
         <p:nvPicPr>
-          <p:cNvPr id="3" name="Image 0" descr="/home/marco/fy27-hackathons/frontier-ai-starter-kit-rvas/docs/assets/img/logo-mark-slide.png">    </p:cNvPr>
+          <p:cNvPr id="3" name="Image 0" descr="/Users/marco/Desktop/repo/frontier-agentic-cobuild-rvas/docs/assets/img/logo-mark-slide.png">    </p:cNvPr>
           <p:cNvPicPr>
             <a:picLocks noChangeAspect="1"/>
           </p:cNvPicPr>
@@ -5650,7 +5615,7 @@
                 <a:ea typeface="Outfit" pitchFamily="34" charset="-122"/>
                 <a:cs typeface="Outfit" pitchFamily="34" charset="-120"/>
               </a:rPr>
-              <a:t>Module 5 — Context</a:t>
+              <a:t>Module 5. Context</a:t>
             </a:r>
             <a:endParaRPr lang="en-US" sz="3400" dirty="0"/>
           </a:p>
@@ -5767,7 +5732,7 @@
                 <a:ea typeface="Inter" pitchFamily="34" charset="-122"/>
                 <a:cs typeface="Inter" pitchFamily="34" charset="-120"/>
               </a:rPr>
-              <a:t>The question is whether employees can understand the message clearly and honestly:</a:t>
+              <a:t>Check the experience with its intended users:</a:t>
             </a:r>
             <a:endParaRPr lang="en-US" sz="1700" dirty="0"/>
           </a:p>
@@ -5857,7 +5822,7 @@
                 <a:ea typeface="Inter" pitchFamily="34" charset="-122"/>
                 <a:cs typeface="Inter" pitchFamily="34" charset="-120"/>
               </a:rPr>
-              <a:t>languages and locale differences are handled intentionally</a:t>
+              <a:t>each language version receives a review against its approved source</a:t>
             </a:r>
             <a:endParaRPr lang="en-US" sz="1700" dirty="0"/>
           </a:p>
@@ -5910,7 +5875,7 @@
                 <a:ea typeface="Inter" pitchFamily="34" charset="-122"/>
                 <a:cs typeface="Inter" pitchFamily="34" charset="-120"/>
               </a:rPr>
-              <a:t>Accessibility and disclosure belong in the product, not post-production cleanup.</a:t>
+              <a:t>Include accessibility and disclosure in the client and publishing workflow.</a:t>
             </a:r>
             <a:endParaRPr lang="en-US" sz="1700" dirty="0"/>
           </a:p>
@@ -5977,7 +5942,7 @@
       </p:sp>
       <p:pic>
         <p:nvPicPr>
-          <p:cNvPr id="3" name="Image 0" descr="/home/marco/fy27-hackathons/frontier-ai-starter-kit-rvas/docs/assets/img/logo-mark-slide.png">    </p:cNvPr>
+          <p:cNvPr id="3" name="Image 0" descr="/Users/marco/Desktop/repo/frontier-agentic-cobuild-rvas/docs/assets/img/logo-mark-slide.png">    </p:cNvPr>
           <p:cNvPicPr>
             <a:picLocks noChangeAspect="1"/>
           </p:cNvPicPr>
@@ -6114,7 +6079,7 @@
                 <a:ea typeface="Outfit" pitchFamily="34" charset="-122"/>
                 <a:cs typeface="Outfit" pitchFamily="34" charset="-120"/>
               </a:rPr>
-              <a:t>Module 5 — Choices and trade-offs</a:t>
+              <a:t>Module 5. Choices and trade-offs</a:t>
             </a:r>
             <a:endParaRPr lang="en-US" sz="3400" dirty="0"/>
           </a:p>
@@ -6155,7 +6120,7 @@
                 <a:ea typeface="Outfit" pitchFamily="34" charset="-122"/>
                 <a:cs typeface="Outfit" pitchFamily="34" charset="-120"/>
               </a:rPr>
-              <a:t>Design for trust, not novelty</a:t>
+              <a:t>Review presentation and access</a:t>
             </a:r>
             <a:endParaRPr lang="en-US" sz="2600" dirty="0"/>
           </a:p>
@@ -6196,7 +6161,7 @@
                 <a:ea typeface="Inter" pitchFamily="34" charset="-122"/>
                 <a:cs typeface="Inter" pitchFamily="34" charset="-120"/>
               </a:rPr>
-              <a:t>Experience choices shape employee trust:</a:t>
+              <a:t>Agree these experience choices:</a:t>
             </a:r>
             <a:endParaRPr lang="en-US" sz="1700" dirty="0"/>
           </a:p>
@@ -6232,7 +6197,7 @@
                 <a:ea typeface="Inter" pitchFamily="34" charset="-122"/>
                 <a:cs typeface="Inter" pitchFamily="34" charset="-120"/>
               </a:rPr>
-              <a:t>Avatar style: realistic avatars can feel polished, but may raise impersonation concerns.</a:t>
+              <a:t>Avatar style: check realistic avatars for impersonation risks.</a:t>
             </a:r>
             <a:endParaRPr lang="en-US" sz="1700" dirty="0"/>
           </a:p>
@@ -6250,7 +6215,7 @@
                 <a:ea typeface="Inter" pitchFamily="34" charset="-122"/>
                 <a:cs typeface="Inter" pitchFamily="34" charset="-120"/>
               </a:rPr>
-              <a:t>Voice: branded voice can improve consistency, but requires consent and rights clarity.</a:t>
+              <a:t>Voice: confirm consent and usage rights before selecting a branded voice.</a:t>
             </a:r>
             <a:endParaRPr lang="en-US" sz="1700" dirty="0"/>
           </a:p>
@@ -6424,7 +6389,7 @@
       </p:sp>
       <p:pic>
         <p:nvPicPr>
-          <p:cNvPr id="3" name="Image 0" descr="/home/marco/fy27-hackathons/frontier-ai-starter-kit-rvas/docs/assets/img/logo-mark-slide.png">    </p:cNvPr>
+          <p:cNvPr id="3" name="Image 0" descr="/Users/marco/Desktop/repo/frontier-agentic-cobuild-rvas/docs/assets/img/logo-mark-slide.png">    </p:cNvPr>
           <p:cNvPicPr>
             <a:picLocks noChangeAspect="1"/>
           </p:cNvPicPr>
@@ -6561,7 +6526,7 @@
                 <a:ea typeface="Outfit" pitchFamily="34" charset="-122"/>
                 <a:cs typeface="Outfit" pitchFamily="34" charset="-120"/>
               </a:rPr>
-              <a:t>Module 5 — What must be true</a:t>
+              <a:t>Module 5. What must be true</a:t>
             </a:r>
             <a:endParaRPr lang="en-US" sz="3400" dirty="0"/>
           </a:p>
@@ -6888,7 +6853,7 @@
       </p:sp>
       <p:pic>
         <p:nvPicPr>
-          <p:cNvPr id="3" name="Image 0" descr="/home/marco/fy27-hackathons/frontier-ai-starter-kit-rvas/docs/assets/img/logo-mark-slide.png">    </p:cNvPr>
+          <p:cNvPr id="3" name="Image 0" descr="/Users/marco/Desktop/repo/frontier-agentic-cobuild-rvas/docs/assets/img/logo-mark-slide.png">    </p:cNvPr>
           <p:cNvPicPr>
             <a:picLocks noChangeAspect="1"/>
           </p:cNvPicPr>
@@ -7025,7 +6990,7 @@
                 <a:ea typeface="Outfit" pitchFamily="34" charset="-122"/>
                 <a:cs typeface="Outfit" pitchFamily="34" charset="-120"/>
               </a:rPr>
-              <a:t>Module 6 — Context</a:t>
+              <a:t>Module 6. Context</a:t>
             </a:r>
             <a:endParaRPr lang="en-US" sz="3400" dirty="0"/>
           </a:p>
@@ -7107,7 +7072,7 @@
                 <a:ea typeface="Inter" pitchFamily="34" charset="-122"/>
                 <a:cs typeface="Inter" pitchFamily="34" charset="-120"/>
               </a:rPr>
-              <a:t>Human approval turns generated content into accountable communication.</a:t>
+              <a:t>Bind human approval to the exact revision that will reach users.</a:t>
             </a:r>
             <a:endParaRPr lang="en-US" sz="1700" dirty="0"/>
           </a:p>
@@ -7142,7 +7107,7 @@
                 <a:ea typeface="Inter" pitchFamily="34" charset="-122"/>
                 <a:cs typeface="Inter" pitchFamily="34" charset="-120"/>
               </a:rPr>
-              <a:t>Before anything is published, named reviewers should confirm:</a:t>
+              <a:t>Before anything is published, named reviewers must check:</a:t>
             </a:r>
             <a:endParaRPr lang="en-US" sz="1700" dirty="0"/>
           </a:p>
@@ -7352,7 +7317,7 @@
       </p:sp>
       <p:pic>
         <p:nvPicPr>
-          <p:cNvPr id="3" name="Image 0" descr="/home/marco/fy27-hackathons/frontier-ai-starter-kit-rvas/docs/assets/img/logo-mark-slide.png">    </p:cNvPr>
+          <p:cNvPr id="3" name="Image 0" descr="/Users/marco/Desktop/repo/frontier-agentic-cobuild-rvas/docs/assets/img/logo-mark-slide.png">    </p:cNvPr>
           <p:cNvPicPr>
             <a:picLocks noChangeAspect="1"/>
           </p:cNvPicPr>
@@ -7489,7 +7454,7 @@
                 <a:ea typeface="Outfit" pitchFamily="34" charset="-122"/>
                 <a:cs typeface="Outfit" pitchFamily="34" charset="-120"/>
               </a:rPr>
-              <a:t>Module 6 — Choices and trade-offs</a:t>
+              <a:t>Module 6. Choices and trade-offs</a:t>
             </a:r>
             <a:endParaRPr lang="en-US" sz="3400" dirty="0"/>
           </a:p>
@@ -7571,41 +7536,6 @@
                 <a:ea typeface="Inter" pitchFamily="34" charset="-122"/>
                 <a:cs typeface="Inter" pitchFamily="34" charset="-120"/>
               </a:rPr>
-              <a:t>Approval should protect the organization without turning every typo into a governance crisis.</a:t>
-            </a:r>
-            <a:endParaRPr lang="en-US" sz="1700" dirty="0"/>
-          </a:p>
-          <a:p>
-            <a:pPr indent="0" marL="0">
-              <a:buNone/>
-            </a:pPr>
-            <a:r>
-              <a:rPr lang="en-US" sz="1700" dirty="0">
-                <a:solidFill>
-                  <a:srgbClr val="111827"/>
-                </a:solidFill>
-                <a:latin typeface="Inter" pitchFamily="34" charset="0"/>
-                <a:ea typeface="Inter" pitchFamily="34" charset="-122"/>
-                <a:cs typeface="Inter" pitchFamily="34" charset="-120"/>
-              </a:rPr>
-              <a:t>
-</a:t>
-            </a:r>
-            <a:endParaRPr lang="en-US" sz="1700" dirty="0"/>
-          </a:p>
-          <a:p>
-            <a:pPr indent="0" marL="0">
-              <a:buNone/>
-            </a:pPr>
-            <a:r>
-              <a:rPr lang="en-US" sz="1700" dirty="0">
-                <a:solidFill>
-                  <a:srgbClr val="111827"/>
-                </a:solidFill>
-                <a:latin typeface="Inter" pitchFamily="34" charset="0"/>
-                <a:ea typeface="Inter" pitchFamily="34" charset="-122"/>
-                <a:cs typeface="Inter" pitchFamily="34" charset="-120"/>
-              </a:rPr>
               <a:t>Decisions to make:</a:t>
             </a:r>
             <a:endParaRPr lang="en-US" sz="1700" dirty="0"/>
@@ -7749,7 +7679,7 @@
                 <a:ea typeface="Inter" pitchFamily="34" charset="-122"/>
                 <a:cs typeface="Inter" pitchFamily="34" charset="-120"/>
               </a:rPr>
-              <a:t>The approval gate must be easy to use and strong enough to stop unsafe publication.</a:t>
+              <a:t>Verify that changed or unapproved revisions cannot publish.</a:t>
             </a:r>
             <a:endParaRPr lang="en-US" sz="1700" dirty="0"/>
           </a:p>
@@ -7789,7 +7719,7 @@
       </p:grpSpPr>
       <p:pic>
         <p:nvPicPr>
-          <p:cNvPr id="2" name="Image 0" descr="/home/marco/fy27-hackathons/frontier-ai-starter-kit-rvas/docs/assets/img/logo-mark-white-slide.png">    </p:cNvPr>
+          <p:cNvPr id="2" name="Image 0" descr="/Users/marco/Desktop/repo/frontier-agentic-cobuild-rvas/docs/assets/img/logo-mark-white-slide.png">    </p:cNvPr>
           <p:cNvPicPr>
             <a:picLocks noChangeAspect="1"/>
           </p:cNvPicPr>
@@ -8639,7 +8569,7 @@
       </p:sp>
       <p:pic>
         <p:nvPicPr>
-          <p:cNvPr id="3" name="Image 0" descr="/home/marco/fy27-hackathons/frontier-ai-starter-kit-rvas/docs/assets/img/logo-mark-slide.png">    </p:cNvPr>
+          <p:cNvPr id="3" name="Image 0" descr="/Users/marco/Desktop/repo/frontier-agentic-cobuild-rvas/docs/assets/img/logo-mark-slide.png">    </p:cNvPr>
           <p:cNvPicPr>
             <a:picLocks noChangeAspect="1"/>
           </p:cNvPicPr>
@@ -8776,7 +8706,7 @@
                 <a:ea typeface="Outfit" pitchFamily="34" charset="-122"/>
                 <a:cs typeface="Outfit" pitchFamily="34" charset="-120"/>
               </a:rPr>
-              <a:t>Module 6 — What must be true</a:t>
+              <a:t>Module 6. What must be true</a:t>
             </a:r>
             <a:endParaRPr lang="en-US" sz="3400" dirty="0"/>
           </a:p>
@@ -9103,7 +9033,7 @@
       </p:sp>
       <p:pic>
         <p:nvPicPr>
-          <p:cNvPr id="3" name="Image 0" descr="/home/marco/fy27-hackathons/frontier-ai-starter-kit-rvas/docs/assets/img/logo-mark-slide.png">    </p:cNvPr>
+          <p:cNvPr id="3" name="Image 0" descr="/Users/marco/Desktop/repo/frontier-agentic-cobuild-rvas/docs/assets/img/logo-mark-slide.png">    </p:cNvPr>
           <p:cNvPicPr>
             <a:picLocks noChangeAspect="1"/>
           </p:cNvPicPr>
@@ -9240,7 +9170,7 @@
                 <a:ea typeface="Outfit" pitchFamily="34" charset="-122"/>
                 <a:cs typeface="Outfit" pitchFamily="34" charset="-120"/>
               </a:rPr>
-              <a:t>Module 7 — Context</a:t>
+              <a:t>Module 7. Context</a:t>
             </a:r>
             <a:endParaRPr lang="en-US" sz="3400" dirty="0"/>
           </a:p>
@@ -9322,7 +9252,7 @@
                 <a:ea typeface="Inter" pitchFamily="34" charset="-122"/>
                 <a:cs typeface="Inter" pitchFamily="34" charset="-120"/>
               </a:rPr>
-              <a:t>The pilot should produce evidence for a business decision, not just engagement numbers.</a:t>
+              <a:t>Use the pilot's quality and user-task evidence to make the release decision.</a:t>
             </a:r>
             <a:endParaRPr lang="en-US" sz="1700" dirty="0"/>
           </a:p>
@@ -9585,7 +9515,7 @@
       </p:sp>
       <p:pic>
         <p:nvPicPr>
-          <p:cNvPr id="3" name="Image 0" descr="/home/marco/fy27-hackathons/frontier-ai-starter-kit-rvas/docs/assets/img/logo-mark-slide.png">    </p:cNvPr>
+          <p:cNvPr id="3" name="Image 0" descr="/Users/marco/Desktop/repo/frontier-agentic-cobuild-rvas/docs/assets/img/logo-mark-slide.png">    </p:cNvPr>
           <p:cNvPicPr>
             <a:picLocks noChangeAspect="1"/>
           </p:cNvPicPr>
@@ -9722,7 +9652,7 @@
                 <a:ea typeface="Outfit" pitchFamily="34" charset="-122"/>
                 <a:cs typeface="Outfit" pitchFamily="34" charset="-120"/>
               </a:rPr>
-              <a:t>Module 7 — Choices and trade-offs</a:t>
+              <a:t>Module 7. Choices and trade-offs</a:t>
             </a:r>
             <a:endParaRPr lang="en-US" sz="3400" dirty="0"/>
           </a:p>
@@ -9763,7 +9693,7 @@
                 <a:ea typeface="Outfit" pitchFamily="34" charset="-122"/>
                 <a:cs typeface="Outfit" pitchFamily="34" charset="-120"/>
               </a:rPr>
-              <a:t>Measure enough to learn, not enough to surveil</a:t>
+              <a:t>Use aggregate measurement</a:t>
             </a:r>
             <a:endParaRPr lang="en-US" sz="2600" dirty="0"/>
           </a:p>
@@ -9804,7 +9734,7 @@
                 <a:ea typeface="Inter" pitchFamily="34" charset="-122"/>
                 <a:cs typeface="Inter" pitchFamily="34" charset="-120"/>
               </a:rPr>
-              <a:t>Operating the experience requires careful measurement:</a:t>
+              <a:t>Agree the measurement rules:</a:t>
             </a:r>
             <a:endParaRPr lang="en-US" sz="1700" dirty="0"/>
           </a:p>
@@ -9947,7 +9877,7 @@
                 <a:ea typeface="Inter" pitchFamily="34" charset="-122"/>
                 <a:cs typeface="Inter" pitchFamily="34" charset="-120"/>
               </a:rPr>
-              <a:t>Use evidence to improve the experience without making employees feel observed.</a:t>
+              <a:t>Keep onboarding measurement aggregate and identifier-free.</a:t>
             </a:r>
             <a:endParaRPr lang="en-US" sz="1700" dirty="0"/>
           </a:p>
@@ -10014,7 +9944,7 @@
       </p:sp>
       <p:pic>
         <p:nvPicPr>
-          <p:cNvPr id="3" name="Image 0" descr="/home/marco/fy27-hackathons/frontier-ai-starter-kit-rvas/docs/assets/img/logo-mark-slide.png">    </p:cNvPr>
+          <p:cNvPr id="3" name="Image 0" descr="/Users/marco/Desktop/repo/frontier-agentic-cobuild-rvas/docs/assets/img/logo-mark-slide.png">    </p:cNvPr>
           <p:cNvPicPr>
             <a:picLocks noChangeAspect="1"/>
           </p:cNvPicPr>
@@ -10151,7 +10081,7 @@
                 <a:ea typeface="Outfit" pitchFamily="34" charset="-122"/>
                 <a:cs typeface="Outfit" pitchFamily="34" charset="-120"/>
               </a:rPr>
-              <a:t>Module 7 — What must be true</a:t>
+              <a:t>Module 7. What must be true</a:t>
             </a:r>
             <a:endParaRPr lang="en-US" sz="3400" dirty="0"/>
           </a:p>
@@ -10451,7 +10381,7 @@
       </p:grpSpPr>
       <p:pic>
         <p:nvPicPr>
-          <p:cNvPr id="2" name="Image 0" descr="/home/marco/fy27-hackathons/frontier-ai-starter-kit-rvas/docs/assets/img/logo-mark-white-slide.png">    </p:cNvPr>
+          <p:cNvPr id="2" name="Image 0" descr="/Users/marco/Desktop/repo/frontier-agentic-cobuild-rvas/docs/assets/img/logo-mark-white-slide.png">    </p:cNvPr>
           <p:cNvPicPr>
             <a:picLocks noChangeAspect="1"/>
           </p:cNvPicPr>
@@ -10902,7 +10832,7 @@
                 <a:ea typeface="Inter" pitchFamily="34" charset="-122"/>
                 <a:cs typeface="Inter" pitchFamily="34" charset="-120"/>
               </a:rPr>
-              <a:t>Working outcome: a narrow, governed pilot that teams can build, review, and measure. The Agentic Co-build is not the full production solution.</a:t>
+              <a:t>The Agentic Co-build covers the bounded pilot. Production integration remains the customer's work.</a:t>
             </a:r>
             <a:endParaRPr lang="en-US" sz="1700" dirty="0"/>
           </a:p>
@@ -10969,7 +10899,7 @@
       </p:sp>
       <p:pic>
         <p:nvPicPr>
-          <p:cNvPr id="3" name="Image 0" descr="/home/marco/fy27-hackathons/frontier-ai-starter-kit-rvas/docs/assets/img/logo-mark-slide.png">    </p:cNvPr>
+          <p:cNvPr id="3" name="Image 0" descr="/Users/marco/Desktop/repo/frontier-agentic-cobuild-rvas/docs/assets/img/logo-mark-slide.png">    </p:cNvPr>
           <p:cNvPicPr>
             <a:picLocks noChangeAspect="1"/>
           </p:cNvPicPr>
@@ -11106,7 +11036,7 @@
                 <a:ea typeface="Outfit" pitchFamily="34" charset="-122"/>
                 <a:cs typeface="Outfit" pitchFamily="34" charset="-120"/>
               </a:rPr>
-              <a:t>Module 1 — Context</a:t>
+              <a:t>Module 1. Context</a:t>
             </a:r>
             <a:endParaRPr lang="en-US" sz="3400" dirty="0"/>
           </a:p>
@@ -11325,7 +11255,7 @@
       </p:sp>
       <p:pic>
         <p:nvPicPr>
-          <p:cNvPr id="3" name="Image 0" descr="/home/marco/fy27-hackathons/frontier-ai-starter-kit-rvas/docs/assets/img/logo-mark-slide.png">    </p:cNvPr>
+          <p:cNvPr id="3" name="Image 0" descr="/Users/marco/Desktop/repo/frontier-agentic-cobuild-rvas/docs/assets/img/logo-mark-slide.png">    </p:cNvPr>
           <p:cNvPicPr>
             <a:picLocks noChangeAspect="1"/>
           </p:cNvPicPr>
@@ -11462,7 +11392,7 @@
                 <a:ea typeface="Outfit" pitchFamily="34" charset="-122"/>
                 <a:cs typeface="Outfit" pitchFamily="34" charset="-120"/>
               </a:rPr>
-              <a:t>Module 1 — Choices and trade-offs</a:t>
+              <a:t>Module 1. Choices and trade-offs</a:t>
             </a:r>
             <a:endParaRPr lang="en-US" sz="3400" dirty="0"/>
           </a:p>
@@ -11598,7 +11528,7 @@
                 <a:ea typeface="Inter" pitchFamily="34" charset="-122"/>
                 <a:cs typeface="Inter" pitchFamily="34" charset="-120"/>
               </a:rPr>
-              <a:t>Real-time avatar: more interactive; higher latency, consent, moderation, and support expectations.</a:t>
+              <a:t>Real-time avatar: supports interaction; plan for latency, consent, moderation, and live support.</a:t>
             </a:r>
             <a:endParaRPr lang="en-US" sz="1500" dirty="0"/>
           </a:p>
@@ -11616,7 +11546,7 @@
                 <a:ea typeface="Inter" pitchFamily="34" charset="-122"/>
                 <a:cs typeface="Inter" pitchFamily="34" charset="-120"/>
               </a:rPr>
-              <a:t>Voice or audio-first: lower production weight; may meet accessibility and channel needs better.</a:t>
+              <a:t>Voice or audio-first: needs less media production; compare it against accessibility and channel requirements.</a:t>
             </a:r>
             <a:endParaRPr lang="en-US" sz="1500" dirty="0"/>
           </a:p>
@@ -11652,7 +11582,7 @@
                 <a:ea typeface="Inter" pitchFamily="34" charset="-122"/>
                 <a:cs typeface="Inter" pitchFamily="34" charset="-120"/>
               </a:rPr>
-              <a:t>No avatar: still valid when disclosure, accessibility, cost, or trust argues for a simpler format.</a:t>
+              <a:t>No avatar: use text or audio when a visible presenter adds no value or cannot meet the requirements.</a:t>
             </a:r>
             <a:endParaRPr lang="en-US" sz="1500" dirty="0"/>
           </a:p>
@@ -11754,7 +11684,7 @@
       </p:sp>
       <p:pic>
         <p:nvPicPr>
-          <p:cNvPr id="3" name="Image 0" descr="/home/marco/fy27-hackathons/frontier-ai-starter-kit-rvas/docs/assets/img/logo-mark-slide.png">    </p:cNvPr>
+          <p:cNvPr id="3" name="Image 0" descr="/Users/marco/Desktop/repo/frontier-agentic-cobuild-rvas/docs/assets/img/logo-mark-slide.png">    </p:cNvPr>
           <p:cNvPicPr>
             <a:picLocks noChangeAspect="1"/>
           </p:cNvPicPr>
@@ -11891,7 +11821,7 @@
                 <a:ea typeface="Outfit" pitchFamily="34" charset="-122"/>
                 <a:cs typeface="Outfit" pitchFamily="34" charset="-120"/>
               </a:rPr>
-              <a:t>Module 1 — What must be true</a:t>
+              <a:t>Module 1. What must be true</a:t>
             </a:r>
             <a:endParaRPr lang="en-US" sz="3400" dirty="0"/>
           </a:p>
@@ -11973,7 +11903,7 @@
                 <a:ea typeface="Inter" pitchFamily="34" charset="-122"/>
                 <a:cs typeface="Inter" pitchFamily="34" charset="-120"/>
               </a:rPr>
-              <a:t>By the end of this module, the team should have a short decision record that states:</a:t>
+              <a:t>Record these decisions before provisioning:</a:t>
             </a:r>
             <a:endParaRPr lang="en-US" sz="1700" dirty="0"/>
           </a:p>
@@ -12183,7 +12113,7 @@
       </p:sp>
       <p:pic>
         <p:nvPicPr>
-          <p:cNvPr id="3" name="Image 0" descr="/home/marco/fy27-hackathons/frontier-ai-starter-kit-rvas/docs/assets/img/logo-mark-slide.png">    </p:cNvPr>
+          <p:cNvPr id="3" name="Image 0" descr="/Users/marco/Desktop/repo/frontier-agentic-cobuild-rvas/docs/assets/img/logo-mark-slide.png">    </p:cNvPr>
           <p:cNvPicPr>
             <a:picLocks noChangeAspect="1"/>
           </p:cNvPicPr>
@@ -12320,7 +12250,7 @@
                 <a:ea typeface="Outfit" pitchFamily="34" charset="-122"/>
                 <a:cs typeface="Outfit" pitchFamily="34" charset="-120"/>
               </a:rPr>
-              <a:t>Module 2 — Context</a:t>
+              <a:t>Module 2. Context</a:t>
             </a:r>
             <a:endParaRPr lang="en-US" sz="3400" dirty="0"/>
           </a:p>
@@ -12402,7 +12332,7 @@
                 <a:ea typeface="Inter" pitchFamily="34" charset="-122"/>
                 <a:cs typeface="Inter" pitchFamily="34" charset="-120"/>
               </a:rPr>
-              <a:t>The scenario needs a foundation so each prototype does not become a one-off integration.</a:t>
+              <a:t>Connect the selected services through the customer's approved identity and network.</a:t>
             </a:r>
             <a:endParaRPr lang="en-US" sz="1700" dirty="0"/>
           </a:p>
@@ -12546,41 +12476,6 @@
                 <a:cs typeface="Inter" pitchFamily="34" charset="-120"/>
               </a:rPr>
               <a:t>telemetry that helps owners understand behavior without over-collecting employee data</a:t>
-            </a:r>
-            <a:endParaRPr lang="en-US" sz="1700" dirty="0"/>
-          </a:p>
-          <a:p>
-            <a:pPr indent="0" marL="0">
-              <a:buNone/>
-            </a:pPr>
-            <a:r>
-              <a:rPr lang="en-US" sz="1700" dirty="0">
-                <a:solidFill>
-                  <a:srgbClr val="111827"/>
-                </a:solidFill>
-                <a:latin typeface="Inter" pitchFamily="34" charset="0"/>
-                <a:ea typeface="Inter" pitchFamily="34" charset="-122"/>
-                <a:cs typeface="Inter" pitchFamily="34" charset="-120"/>
-              </a:rPr>
-              <a:t>
-</a:t>
-            </a:r>
-            <a:endParaRPr lang="en-US" sz="1700" dirty="0"/>
-          </a:p>
-          <a:p>
-            <a:pPr indent="0" marL="0">
-              <a:buNone/>
-            </a:pPr>
-            <a:r>
-              <a:rPr lang="en-US" sz="1700" dirty="0">
-                <a:solidFill>
-                  <a:srgbClr val="111827"/>
-                </a:solidFill>
-                <a:latin typeface="Inter" pitchFamily="34" charset="0"/>
-                <a:ea typeface="Inter" pitchFamily="34" charset="-122"/>
-                <a:cs typeface="Inter" pitchFamily="34" charset="-120"/>
-              </a:rPr>
-              <a:t>This becomes the shared base for policy, learning, and multilingual communication scenarios.</a:t>
             </a:r>
             <a:endParaRPr lang="en-US" sz="1700" dirty="0"/>
           </a:p>
@@ -12647,7 +12542,7 @@
       </p:sp>
       <p:pic>
         <p:nvPicPr>
-          <p:cNvPr id="3" name="Image 0" descr="/home/marco/fy27-hackathons/frontier-ai-starter-kit-rvas/docs/assets/img/logo-mark-slide.png">    </p:cNvPr>
+          <p:cNvPr id="3" name="Image 0" descr="/Users/marco/Desktop/repo/frontier-agentic-cobuild-rvas/docs/assets/img/logo-mark-slide.png">    </p:cNvPr>
           <p:cNvPicPr>
             <a:picLocks noChangeAspect="1"/>
           </p:cNvPicPr>
@@ -12784,7 +12679,7 @@
                 <a:ea typeface="Outfit" pitchFamily="34" charset="-122"/>
                 <a:cs typeface="Outfit" pitchFamily="34" charset="-120"/>
               </a:rPr>
-              <a:t>Module 2 — Choices and trade-offs</a:t>
+              <a:t>Module 2. Choices and trade-offs</a:t>
             </a:r>
             <a:endParaRPr lang="en-US" sz="3400" dirty="0"/>
           </a:p>
@@ -12825,7 +12720,7 @@
                 <a:ea typeface="Outfit" pitchFamily="34" charset="-122"/>
                 <a:cs typeface="Outfit" pitchFamily="34" charset="-120"/>
               </a:rPr>
-              <a:t>Reusable platform, not hard-coded demo</a:t>
+              <a:t>Keep components replaceable</a:t>
             </a:r>
             <a:endParaRPr lang="en-US" sz="2600" dirty="0"/>
           </a:p>
@@ -12858,24 +12753,24 @@
               <a:buNone/>
             </a:pPr>
             <a:r>
-              <a:rPr lang="en-US" sz="1500" dirty="0">
-                <a:solidFill>
-                  <a:srgbClr val="111827"/>
-                </a:solidFill>
-                <a:latin typeface="Inter" pitchFamily="34" charset="0"/>
-                <a:ea typeface="Inter" pitchFamily="34" charset="-122"/>
-                <a:cs typeface="Inter" pitchFamily="34" charset="-120"/>
-              </a:rPr>
-              <a:t>Key design choices decide whether the pilot can become a repeatable pattern:</a:t>
-            </a:r>
-            <a:endParaRPr lang="en-US" sz="1500" dirty="0"/>
-          </a:p>
-          <a:p>
-            <a:pPr indent="0" marL="0">
-              <a:buNone/>
-            </a:pPr>
-            <a:r>
-              <a:rPr lang="en-US" sz="1500" dirty="0">
+              <a:rPr lang="en-US" sz="1700" dirty="0">
+                <a:solidFill>
+                  <a:srgbClr val="111827"/>
+                </a:solidFill>
+                <a:latin typeface="Inter" pitchFamily="34" charset="0"/>
+                <a:ea typeface="Inter" pitchFamily="34" charset="-122"/>
+                <a:cs typeface="Inter" pitchFamily="34" charset="-120"/>
+              </a:rPr>
+              <a:t>Agree these platform choices:</a:t>
+            </a:r>
+            <a:endParaRPr lang="en-US" sz="1700" dirty="0"/>
+          </a:p>
+          <a:p>
+            <a:pPr indent="0" marL="0">
+              <a:buNone/>
+            </a:pPr>
+            <a:r>
+              <a:rPr lang="en-US" sz="1700" dirty="0">
                 <a:solidFill>
                   <a:srgbClr val="111827"/>
                 </a:solidFill>
@@ -12886,15 +12781,15 @@
               <a:t>
 </a:t>
             </a:r>
-            <a:endParaRPr lang="en-US" sz="1500" dirty="0"/>
-          </a:p>
-          <a:p>
-            <a:pPr marL="190500" indent="-190500">
+            <a:endParaRPr lang="en-US" sz="1700" dirty="0"/>
+          </a:p>
+          <a:p>
+            <a:pPr marL="215900" indent="-215900">
               <a:buSzPct val="100000"/>
               <a:buChar char="•"/>
             </a:pPr>
             <a:r>
-              <a:rPr lang="en-US" sz="1500" dirty="0">
+              <a:rPr lang="en-US" sz="1700" dirty="0">
                 <a:solidFill>
                   <a:srgbClr val="111827"/>
                 </a:solidFill>
@@ -12904,15 +12799,15 @@
               </a:rPr>
               <a:t>Identity: managed identity and role-based access reduce secret handling, but require clear ownership.</a:t>
             </a:r>
-            <a:endParaRPr lang="en-US" sz="1500" dirty="0"/>
-          </a:p>
-          <a:p>
-            <a:pPr marL="190500" indent="-190500">
+            <a:endParaRPr lang="en-US" sz="1700" dirty="0"/>
+          </a:p>
+          <a:p>
+            <a:pPr marL="215900" indent="-215900">
               <a:buSzPct val="100000"/>
               <a:buChar char="•"/>
             </a:pPr>
             <a:r>
-              <a:rPr lang="en-US" sz="1500" dirty="0">
+              <a:rPr lang="en-US" sz="1700" dirty="0">
                 <a:solidFill>
                   <a:srgbClr val="111827"/>
                 </a:solidFill>
@@ -12922,15 +12817,15 @@
               </a:rPr>
               <a:t>Region and capacity: availability, latency, data residency, and cost may point to different deployment choices.</a:t>
             </a:r>
-            <a:endParaRPr lang="en-US" sz="1500" dirty="0"/>
-          </a:p>
-          <a:p>
-            <a:pPr marL="190500" indent="-190500">
+            <a:endParaRPr lang="en-US" sz="1700" dirty="0"/>
+          </a:p>
+          <a:p>
+            <a:pPr marL="215900" indent="-215900">
               <a:buSzPct val="100000"/>
               <a:buChar char="•"/>
             </a:pPr>
             <a:r>
-              <a:rPr lang="en-US" sz="1500" dirty="0">
+              <a:rPr lang="en-US" sz="1700" dirty="0">
                 <a:solidFill>
                   <a:srgbClr val="111827"/>
                 </a:solidFill>
@@ -12940,15 +12835,15 @@
               </a:rPr>
               <a:t>Model path: a general model may be enough for drafting; stricter use cases may need more evaluation and guardrails.</a:t>
             </a:r>
-            <a:endParaRPr lang="en-US" sz="1500" dirty="0"/>
-          </a:p>
-          <a:p>
-            <a:pPr marL="190500" indent="-190500">
+            <a:endParaRPr lang="en-US" sz="1700" dirty="0"/>
+          </a:p>
+          <a:p>
+            <a:pPr marL="215900" indent="-215900">
               <a:buSzPct val="100000"/>
               <a:buChar char="•"/>
             </a:pPr>
             <a:r>
-              <a:rPr lang="en-US" sz="1500" dirty="0">
+              <a:rPr lang="en-US" sz="1700" dirty="0">
                 <a:solidFill>
                   <a:srgbClr val="111827"/>
                 </a:solidFill>
@@ -12958,60 +12853,25 @@
               </a:rPr>
               <a:t>Observability: useful traces help diagnose issues, but message content capture must be intentional and governed.</a:t>
             </a:r>
-            <a:endParaRPr lang="en-US" sz="1500" dirty="0"/>
-          </a:p>
-          <a:p>
-            <a:pPr marL="190500" indent="-190500">
+            <a:endParaRPr lang="en-US" sz="1700" dirty="0"/>
+          </a:p>
+          <a:p>
+            <a:pPr marL="215900" indent="-215900">
               <a:buSzPct val="100000"/>
               <a:buChar char="•"/>
             </a:pPr>
             <a:r>
-              <a:rPr lang="en-US" sz="1500" dirty="0">
-                <a:solidFill>
-                  <a:srgbClr val="111827"/>
-                </a:solidFill>
-                <a:latin typeface="Inter" pitchFamily="34" charset="0"/>
-                <a:ea typeface="Inter" pitchFamily="34" charset="-122"/>
-                <a:cs typeface="Inter" pitchFamily="34" charset="-120"/>
-              </a:rPr>
-              <a:t>Seams: keep rendering, assistant, content, and approval components replaceable.</a:t>
-            </a:r>
-            <a:endParaRPr lang="en-US" sz="1500" dirty="0"/>
-          </a:p>
-          <a:p>
-            <a:pPr indent="0" marL="0">
-              <a:buNone/>
-            </a:pPr>
-            <a:r>
-              <a:rPr lang="en-US" sz="1500" dirty="0">
-                <a:solidFill>
-                  <a:srgbClr val="111827"/>
-                </a:solidFill>
-                <a:latin typeface="Inter" pitchFamily="34" charset="0"/>
-                <a:ea typeface="Inter" pitchFamily="34" charset="-122"/>
-                <a:cs typeface="Inter" pitchFamily="34" charset="-120"/>
-              </a:rPr>
-              <a:t>
-</a:t>
-            </a:r>
-            <a:endParaRPr lang="en-US" sz="1500" dirty="0"/>
-          </a:p>
-          <a:p>
-            <a:pPr indent="0" marL="0">
-              <a:buNone/>
-            </a:pPr>
-            <a:r>
-              <a:rPr lang="en-US" sz="1500" dirty="0">
-                <a:solidFill>
-                  <a:srgbClr val="111827"/>
-                </a:solidFill>
-                <a:latin typeface="Inter" pitchFamily="34" charset="0"/>
-                <a:ea typeface="Inter" pitchFamily="34" charset="-122"/>
-                <a:cs typeface="Inter" pitchFamily="34" charset="-120"/>
-              </a:rPr>
-              <a:t>Build a foundation customers can adapt. Avoid a locked architecture.</a:t>
-            </a:r>
-            <a:endParaRPr lang="en-US" sz="1500" dirty="0"/>
+              <a:rPr lang="en-US" sz="1700" dirty="0">
+                <a:solidFill>
+                  <a:srgbClr val="111827"/>
+                </a:solidFill>
+                <a:latin typeface="Inter" pitchFamily="34" charset="0"/>
+                <a:ea typeface="Inter" pitchFamily="34" charset="-122"/>
+                <a:cs typeface="Inter" pitchFamily="34" charset="-120"/>
+              </a:rPr>
+              <a:t>Integration contracts: keep rendering, assistant, content, and approval components replaceable.</a:t>
+            </a:r>
+            <a:endParaRPr lang="en-US" sz="1700" dirty="0"/>
           </a:p>
         </p:txBody>
       </p:sp>
@@ -13076,7 +12936,7 @@
       </p:sp>
       <p:pic>
         <p:nvPicPr>
-          <p:cNvPr id="3" name="Image 0" descr="/home/marco/fy27-hackathons/frontier-ai-starter-kit-rvas/docs/assets/img/logo-mark-slide.png">    </p:cNvPr>
+          <p:cNvPr id="3" name="Image 0" descr="/Users/marco/Desktop/repo/frontier-agentic-cobuild-rvas/docs/assets/img/logo-mark-slide.png">    </p:cNvPr>
           <p:cNvPicPr>
             <a:picLocks noChangeAspect="1"/>
           </p:cNvPicPr>
@@ -13213,7 +13073,7 @@
                 <a:ea typeface="Outfit" pitchFamily="34" charset="-122"/>
                 <a:cs typeface="Outfit" pitchFamily="34" charset="-120"/>
               </a:rPr>
-              <a:t>Module 2 — What must be true</a:t>
+              <a:t>Module 2. What must be true</a:t>
             </a:r>
             <a:endParaRPr lang="en-US" sz="3400" dirty="0"/>
           </a:p>
@@ -13295,7 +13155,7 @@
                 <a:ea typeface="Inter" pitchFamily="34" charset="-122"/>
                 <a:cs typeface="Inter" pitchFamily="34" charset="-120"/>
               </a:rPr>
-              <a:t>The test is whether the foundation can run accountably:</a:t>
+              <a:t>Verify these conditions:</a:t>
             </a:r>
             <a:endParaRPr lang="en-US" sz="1700" dirty="0"/>
           </a:p>
@@ -13505,7 +13365,7 @@
       </p:sp>
       <p:pic>
         <p:nvPicPr>
-          <p:cNvPr id="3" name="Image 0" descr="/home/marco/fy27-hackathons/frontier-ai-starter-kit-rvas/docs/assets/img/logo-mark-slide.png">    </p:cNvPr>
+          <p:cNvPr id="3" name="Image 0" descr="/Users/marco/Desktop/repo/frontier-agentic-cobuild-rvas/docs/assets/img/logo-mark-slide.png">    </p:cNvPr>
           <p:cNvPicPr>
             <a:picLocks noChangeAspect="1"/>
           </p:cNvPicPr>
@@ -13642,7 +13502,7 @@
                 <a:ea typeface="Outfit" pitchFamily="34" charset="-122"/>
                 <a:cs typeface="Outfit" pitchFamily="34" charset="-120"/>
               </a:rPr>
-              <a:t>Module 3 — Context</a:t>
+              <a:t>Module 3. Context</a:t>
             </a:r>
             <a:endParaRPr lang="en-US" sz="3400" dirty="0"/>
           </a:p>
